--- a/Real_Estate_Operations_Platform_Master.pptx
+++ b/Real_Estate_Operations_Platform_Master.pptx
@@ -4673,8 +4673,8 @@
         </p:nvSpPr>
         <p:spPr>
           <a:xfrm>
-            <a:off x="6251370" y="2469566"/>
-            <a:ext cx="5200044" cy="3016148"/>
+            <a:off x="6254938" y="2469566"/>
+            <a:ext cx="5192907" cy="3016148"/>
           </a:xfrm>
           <a:prstGeom prst="rect">
             <a:avLst/>
@@ -4706,8 +4706,8 @@
         </p:blipFill>
         <p:spPr>
           <a:xfrm>
-            <a:off x="6267829" y="2486025"/>
-            <a:ext cx="5167126" cy="2983230"/>
+            <a:off x="6271398" y="2486025"/>
+            <a:ext cx="5159989" cy="2983230"/>
           </a:xfrm>
           <a:prstGeom prst="rect">
             <a:avLst/>
